--- a/apresentacao/Acido-Hipocloroso-Apresentacao.pptx
+++ b/apresentacao/Acido-Hipocloroso-Apresentacao.pptx
@@ -4047,8 +4047,8 @@
         </p:nvSpPr>
         <p:spPr>
           <a:xfrm>
-            <a:off x="685800" y="5870448"/>
-            <a:ext cx="10820095" cy="292608"/>
+            <a:off x="685800" y="5724144"/>
+            <a:ext cx="10820095" cy="274320"/>
           </a:xfrm>
           <a:prstGeom prst="rect">
             <a:avLst/>
@@ -18088,8 +18088,8 @@
         </p:nvSpPr>
         <p:spPr>
           <a:xfrm>
-            <a:off x="685800" y="5852160"/>
-            <a:ext cx="10820095" cy="310896"/>
+            <a:off x="685800" y="5687568"/>
+            <a:ext cx="10820095" cy="292608"/>
           </a:xfrm>
           <a:prstGeom prst="rect">
             <a:avLst/>
